--- a/lectures/Lecture_10/slides/Lecture_10_Object_Detection.pptx
+++ b/lectures/Lecture_10/slides/Lecture_10_Object_Detection.pptx
@@ -7971,8 +7971,8 @@
         </p:nvSpPr>
         <p:spPr>
           <a:xfrm>
-            <a:off x="658368" y="1883664"/>
-            <a:ext cx="146304" cy="146304"/>
+            <a:off x="658368" y="1837944"/>
+            <a:ext cx="128016" cy="128016"/>
           </a:xfrm>
           <a:prstGeom prst="rect">
             <a:avLst/>
@@ -8015,8 +8015,8 @@
         </p:nvSpPr>
         <p:spPr>
           <a:xfrm>
-            <a:off x="1042416" y="1700784"/>
-            <a:ext cx="10490911" cy="640080"/>
+            <a:off x="1024128" y="1691640"/>
+            <a:ext cx="10509199" cy="621792"/>
           </a:xfrm>
           <a:prstGeom prst="rect">
             <a:avLst/>
@@ -8057,8 +8057,8 @@
         </p:nvSpPr>
         <p:spPr>
           <a:xfrm>
-            <a:off x="658368" y="2596896"/>
-            <a:ext cx="146304" cy="146304"/>
+            <a:off x="658368" y="2514600"/>
+            <a:ext cx="128016" cy="128016"/>
           </a:xfrm>
           <a:prstGeom prst="rect">
             <a:avLst/>
@@ -8101,8 +8101,8 @@
         </p:nvSpPr>
         <p:spPr>
           <a:xfrm>
-            <a:off x="1042416" y="2414016"/>
-            <a:ext cx="10490911" cy="640080"/>
+            <a:off x="1024128" y="2368296"/>
+            <a:ext cx="10509199" cy="621792"/>
           </a:xfrm>
           <a:prstGeom prst="rect">
             <a:avLst/>
@@ -8143,8 +8143,8 @@
         </p:nvSpPr>
         <p:spPr>
           <a:xfrm>
-            <a:off x="658368" y="3310128"/>
-            <a:ext cx="146304" cy="146304"/>
+            <a:off x="658368" y="3191256"/>
+            <a:ext cx="128016" cy="128016"/>
           </a:xfrm>
           <a:prstGeom prst="rect">
             <a:avLst/>
@@ -8187,8 +8187,8 @@
         </p:nvSpPr>
         <p:spPr>
           <a:xfrm>
-            <a:off x="1042416" y="3127248"/>
-            <a:ext cx="10490911" cy="640080"/>
+            <a:off x="1024128" y="3044952"/>
+            <a:ext cx="10509199" cy="621792"/>
           </a:xfrm>
           <a:prstGeom prst="rect">
             <a:avLst/>
@@ -8229,8 +8229,8 @@
         </p:nvSpPr>
         <p:spPr>
           <a:xfrm>
-            <a:off x="658368" y="4023360"/>
-            <a:ext cx="146304" cy="146304"/>
+            <a:off x="658368" y="3867912"/>
+            <a:ext cx="128016" cy="128016"/>
           </a:xfrm>
           <a:prstGeom prst="rect">
             <a:avLst/>
@@ -8273,8 +8273,8 @@
         </p:nvSpPr>
         <p:spPr>
           <a:xfrm>
-            <a:off x="1042416" y="3840480"/>
-            <a:ext cx="10490911" cy="640080"/>
+            <a:off x="1024128" y="3721608"/>
+            <a:ext cx="10509199" cy="621792"/>
           </a:xfrm>
           <a:prstGeom prst="rect">
             <a:avLst/>
@@ -8315,8 +8315,8 @@
         </p:nvSpPr>
         <p:spPr>
           <a:xfrm>
-            <a:off x="658368" y="4736592"/>
-            <a:ext cx="146304" cy="146304"/>
+            <a:off x="658368" y="4544568"/>
+            <a:ext cx="128016" cy="128016"/>
           </a:xfrm>
           <a:prstGeom prst="rect">
             <a:avLst/>
@@ -8359,8 +8359,8 @@
         </p:nvSpPr>
         <p:spPr>
           <a:xfrm>
-            <a:off x="1042416" y="4553712"/>
-            <a:ext cx="10490911" cy="640080"/>
+            <a:off x="1024128" y="4398264"/>
+            <a:ext cx="10509199" cy="621792"/>
           </a:xfrm>
           <a:prstGeom prst="rect">
             <a:avLst/>
@@ -8401,8 +8401,8 @@
         </p:nvSpPr>
         <p:spPr>
           <a:xfrm>
-            <a:off x="658368" y="5449824"/>
-            <a:ext cx="146304" cy="146304"/>
+            <a:off x="658368" y="5221224"/>
+            <a:ext cx="128016" cy="128016"/>
           </a:xfrm>
           <a:prstGeom prst="rect">
             <a:avLst/>
@@ -8445,8 +8445,8 @@
         </p:nvSpPr>
         <p:spPr>
           <a:xfrm>
-            <a:off x="1042416" y="5266944"/>
-            <a:ext cx="10490911" cy="640080"/>
+            <a:off x="1024128" y="5074920"/>
+            <a:ext cx="10509199" cy="621792"/>
           </a:xfrm>
           <a:prstGeom prst="rect">
             <a:avLst/>
@@ -9417,8 +9417,8 @@
         </p:nvSpPr>
         <p:spPr>
           <a:xfrm>
-            <a:off x="658368" y="1764792"/>
-            <a:ext cx="502920" cy="457200"/>
+            <a:off x="658368" y="1728216"/>
+            <a:ext cx="502920" cy="530352"/>
           </a:xfrm>
           <a:prstGeom prst="rect">
             <a:avLst/>
@@ -9459,8 +9459,8 @@
         </p:nvSpPr>
         <p:spPr>
           <a:xfrm>
-            <a:off x="1344168" y="1783080"/>
-            <a:ext cx="10189159" cy="457200"/>
+            <a:off x="1344168" y="1728216"/>
+            <a:ext cx="10189159" cy="530352"/>
           </a:xfrm>
           <a:prstGeom prst="rect">
             <a:avLst/>
@@ -9501,7 +9501,7 @@
         </p:nvSpPr>
         <p:spPr>
           <a:xfrm>
-            <a:off x="658368" y="2267712"/>
+            <a:off x="658368" y="2276856"/>
             <a:ext cx="10874959" cy="9525"/>
           </a:xfrm>
           <a:prstGeom prst="rect">
@@ -9545,8 +9545,8 @@
         </p:nvSpPr>
         <p:spPr>
           <a:xfrm>
-            <a:off x="658368" y="2368296"/>
-            <a:ext cx="502920" cy="457200"/>
+            <a:off x="658368" y="2331720"/>
+            <a:ext cx="502920" cy="530352"/>
           </a:xfrm>
           <a:prstGeom prst="rect">
             <a:avLst/>
@@ -9587,8 +9587,8 @@
         </p:nvSpPr>
         <p:spPr>
           <a:xfrm>
-            <a:off x="1344168" y="2386584"/>
-            <a:ext cx="10189159" cy="457200"/>
+            <a:off x="1344168" y="2331720"/>
+            <a:ext cx="10189159" cy="530352"/>
           </a:xfrm>
           <a:prstGeom prst="rect">
             <a:avLst/>
@@ -9629,7 +9629,7 @@
         </p:nvSpPr>
         <p:spPr>
           <a:xfrm>
-            <a:off x="658368" y="2871216"/>
+            <a:off x="658368" y="2880360"/>
             <a:ext cx="10874959" cy="9525"/>
           </a:xfrm>
           <a:prstGeom prst="rect">
@@ -9673,8 +9673,8 @@
         </p:nvSpPr>
         <p:spPr>
           <a:xfrm>
-            <a:off x="658368" y="2971800"/>
-            <a:ext cx="502920" cy="457200"/>
+            <a:off x="658368" y="2935224"/>
+            <a:ext cx="502920" cy="530352"/>
           </a:xfrm>
           <a:prstGeom prst="rect">
             <a:avLst/>
@@ -9715,8 +9715,8 @@
         </p:nvSpPr>
         <p:spPr>
           <a:xfrm>
-            <a:off x="1344168" y="2990088"/>
-            <a:ext cx="10189159" cy="457200"/>
+            <a:off x="1344168" y="2935224"/>
+            <a:ext cx="10189159" cy="530352"/>
           </a:xfrm>
           <a:prstGeom prst="rect">
             <a:avLst/>
@@ -9757,7 +9757,7 @@
         </p:nvSpPr>
         <p:spPr>
           <a:xfrm>
-            <a:off x="658368" y="3474720"/>
+            <a:off x="658368" y="3483864"/>
             <a:ext cx="10874959" cy="9525"/>
           </a:xfrm>
           <a:prstGeom prst="rect">
@@ -9801,8 +9801,8 @@
         </p:nvSpPr>
         <p:spPr>
           <a:xfrm>
-            <a:off x="658368" y="3575304"/>
-            <a:ext cx="502920" cy="457200"/>
+            <a:off x="658368" y="3538728"/>
+            <a:ext cx="502920" cy="530352"/>
           </a:xfrm>
           <a:prstGeom prst="rect">
             <a:avLst/>
@@ -9843,8 +9843,8 @@
         </p:nvSpPr>
         <p:spPr>
           <a:xfrm>
-            <a:off x="1344168" y="3593592"/>
-            <a:ext cx="10189159" cy="457200"/>
+            <a:off x="1344168" y="3538728"/>
+            <a:ext cx="10189159" cy="530352"/>
           </a:xfrm>
           <a:prstGeom prst="rect">
             <a:avLst/>
@@ -9885,7 +9885,7 @@
         </p:nvSpPr>
         <p:spPr>
           <a:xfrm>
-            <a:off x="658368" y="4078224"/>
+            <a:off x="658368" y="4087368"/>
             <a:ext cx="10874959" cy="9525"/>
           </a:xfrm>
           <a:prstGeom prst="rect">
@@ -9929,8 +9929,8 @@
         </p:nvSpPr>
         <p:spPr>
           <a:xfrm>
-            <a:off x="658368" y="4178808"/>
-            <a:ext cx="502920" cy="457200"/>
+            <a:off x="658368" y="4142232"/>
+            <a:ext cx="502920" cy="530352"/>
           </a:xfrm>
           <a:prstGeom prst="rect">
             <a:avLst/>
@@ -9971,8 +9971,8 @@
         </p:nvSpPr>
         <p:spPr>
           <a:xfrm>
-            <a:off x="1344168" y="4197096"/>
-            <a:ext cx="10189159" cy="457200"/>
+            <a:off x="1344168" y="4142232"/>
+            <a:ext cx="10189159" cy="530352"/>
           </a:xfrm>
           <a:prstGeom prst="rect">
             <a:avLst/>
@@ -10013,7 +10013,7 @@
         </p:nvSpPr>
         <p:spPr>
           <a:xfrm>
-            <a:off x="658368" y="4681728"/>
+            <a:off x="658368" y="4690872"/>
             <a:ext cx="10874959" cy="9525"/>
           </a:xfrm>
           <a:prstGeom prst="rect">
@@ -10057,8 +10057,8 @@
         </p:nvSpPr>
         <p:spPr>
           <a:xfrm>
-            <a:off x="658368" y="4782312"/>
-            <a:ext cx="502920" cy="457200"/>
+            <a:off x="658368" y="4745736"/>
+            <a:ext cx="502920" cy="530352"/>
           </a:xfrm>
           <a:prstGeom prst="rect">
             <a:avLst/>
@@ -10099,8 +10099,8 @@
         </p:nvSpPr>
         <p:spPr>
           <a:xfrm>
-            <a:off x="1344168" y="4800600"/>
-            <a:ext cx="10189159" cy="457200"/>
+            <a:off x="1344168" y="4745736"/>
+            <a:ext cx="10189159" cy="530352"/>
           </a:xfrm>
           <a:prstGeom prst="rect">
             <a:avLst/>
@@ -10141,7 +10141,7 @@
         </p:nvSpPr>
         <p:spPr>
           <a:xfrm>
-            <a:off x="658368" y="5285232"/>
+            <a:off x="658368" y="5294376"/>
             <a:ext cx="10874959" cy="9525"/>
           </a:xfrm>
           <a:prstGeom prst="rect">
@@ -10185,8 +10185,8 @@
         </p:nvSpPr>
         <p:spPr>
           <a:xfrm>
-            <a:off x="658368" y="5495544"/>
-            <a:ext cx="10874959" cy="457200"/>
+            <a:off x="658368" y="5422392"/>
+            <a:ext cx="10874959" cy="411480"/>
           </a:xfrm>
           <a:prstGeom prst="rect">
             <a:avLst/>
@@ -10208,7 +10208,7 @@
               </a:spcAft>
             </a:pPr>
             <a:r>
-              <a:rPr sz="1400" b="0" i="1">
+              <a:rPr sz="1300" b="0" i="1">
                 <a:solidFill>
                   <a:srgbClr val="5A6375"/>
                 </a:solidFill>
